--- a/presentations/PR_L01_TuckShopTill_Lesson.pptx
+++ b/presentations/PR_L01_TuckShopTill_Lesson.pptx
@@ -2617,7 +2617,7 @@
                 <a:ea typeface="IBM Plex Sans" pitchFamily="34" charset="-122"/>
                 <a:cs typeface="IBM Plex Sans" pitchFamily="34" charset="-120"/>
               </a:rPr>
-              <a:t>Mistake: printing the lines in a different order from the one the task asked for.</a:t>
+              <a:t>Common mistake: printing the lines in a different order from the one the task asked for.</a:t>
             </a:r>
             <a:endParaRPr lang="en-US" sz="1700" dirty="0"/>
           </a:p>
@@ -7839,7 +7839,7 @@
                 <a:ea typeface="IBM Plex Sans" pitchFamily="34" charset="-122"/>
                 <a:cs typeface="IBM Plex Sans" pitchFamily="34" charset="-120"/>
               </a:rPr>
-              <a:t>Mistake: leaving the quotes off, so Python hunts for a variable with that name instead.</a:t>
+              <a:t>Common mistake: leaving the quotes off, so Python hunts for a variable with that name instead.</a:t>
             </a:r>
             <a:endParaRPr lang="en-US" sz="1700" dirty="0"/>
           </a:p>
@@ -8415,7 +8415,7 @@
                 <a:ea typeface="IBM Plex Sans" pitchFamily="34" charset="-122"/>
                 <a:cs typeface="IBM Plex Sans" pitchFamily="34" charset="-120"/>
               </a:rPr>
-              <a:t>Mistake: a second assignment replaces the value, it does not add to it.</a:t>
+              <a:t>Common mistake: a second assignment replaces the value, it does not add to it.</a:t>
             </a:r>
             <a:endParaRPr lang="en-US" sz="1700" dirty="0"/>
           </a:p>
@@ -8991,7 +8991,7 @@
                 <a:ea typeface="IBM Plex Sans" pitchFamily="34" charset="-122"/>
                 <a:cs typeface="IBM Plex Sans" pitchFamily="34" charset="-120"/>
               </a:rPr>
-              <a:t>Mistake: forgetting that input() always gives text, even when digits were typed.</a:t>
+              <a:t>Common mistake: forgetting that input() always gives text, even when digits were typed.</a:t>
             </a:r>
             <a:endParaRPr lang="en-US" sz="1700" dirty="0"/>
           </a:p>
@@ -9567,7 +9567,7 @@
                 <a:ea typeface="IBM Plex Sans" pitchFamily="34" charset="-122"/>
                 <a:cs typeface="IBM Plex Sans" pitchFamily="34" charset="-120"/>
               </a:rPr>
-              <a:t>Mistake: joining a number to a string with +, which Python refuses to do.</a:t>
+              <a:t>Common mistake: joining a number to a string with +, which Python refuses to do.</a:t>
             </a:r>
             <a:endParaRPr lang="en-US" sz="1700" dirty="0"/>
           </a:p>
@@ -10143,7 +10143,7 @@
                 <a:ea typeface="IBM Plex Sans" pitchFamily="34" charset="-122"/>
                 <a:cs typeface="IBM Plex Sans" pitchFamily="34" charset="-120"/>
               </a:rPr>
-              <a:t>Mistake: casting with int() before checking the text really is a whole number.</a:t>
+              <a:t>Common mistake: casting with int() before checking the text really is a whole number.</a:t>
             </a:r>
             <a:endParaRPr lang="en-US" sz="1700" dirty="0"/>
           </a:p>
